--- a/docs/presentation/Slide_1.pptx
+++ b/docs/presentation/Slide_1.pptx
@@ -5,10 +5,11 @@
     <p:sldMasterId id="2147483648" r:id="rId1"/>
   </p:sldMasterIdLst>
   <p:notesMasterIdLst>
-    <p:notesMasterId r:id="rId3"/>
+    <p:notesMasterId r:id="rId4"/>
   </p:notesMasterIdLst>
   <p:sldIdLst>
     <p:sldId id="256" r:id="rId2"/>
+    <p:sldId id="257" r:id="rId3"/>
   </p:sldIdLst>
   <p:sldSz cx="12192000" cy="6858000"/>
   <p:notesSz cx="6858000" cy="12192000"/>
@@ -112,21 +113,37 @@
 </p:presentation>
 </file>
 
+<file path=ppt/revisionInfo.xml><?xml version="1.0" encoding="utf-8"?>
+<p1510:revInfo xmlns:a="http://schemas.openxmlformats.org/drawingml/2006/main" xmlns:r="http://schemas.openxmlformats.org/officeDocument/2006/relationships" xmlns:p1510="http://schemas.microsoft.com/office/powerpoint/2015/10/main">
+  <p1510:revLst>
+    <p1510:client id="{8AC4A416-4C3A-495D-9625-8A44EDC70D33}" v="25" dt="2026-10-06T07:56:24.465"/>
+  </p1510:revLst>
+</p1510:revInfo>
+</file>
+
 <file path=ppt/changesInfos/changesInfo1.xml><?xml version="1.0" encoding="utf-8"?>
 <pc:chgInfo xmlns:a="http://schemas.openxmlformats.org/drawingml/2006/main" xmlns:r="http://schemas.openxmlformats.org/officeDocument/2006/relationships" xmlns:ac="http://schemas.microsoft.com/office/drawing/2013/main/command" xmlns:pc="http://schemas.microsoft.com/office/powerpoint/2013/main/command">
   <pc:docChgLst>
     <pc:chgData name="Hanna Bokariuk" userId="fd5399e8-0949-4b9d-b255-fc007b27d60c" providerId="ADAL" clId="{8C1C02D4-1D0A-483D-B224-A1E06DCB062F}"/>
-    <pc:docChg chg="modSld">
-      <pc:chgData name="Hanna Bokariuk" userId="fd5399e8-0949-4b9d-b255-fc007b27d60c" providerId="ADAL" clId="{8C1C02D4-1D0A-483D-B224-A1E06DCB062F}" dt="2026-10-05T22:30:04.809" v="2" actId="1076"/>
+    <pc:docChg chg="undo custSel modSld">
+      <pc:chgData name="Hanna Bokariuk" userId="fd5399e8-0949-4b9d-b255-fc007b27d60c" providerId="ADAL" clId="{8C1C02D4-1D0A-483D-B224-A1E06DCB062F}" dt="2026-10-06T07:56:36.618" v="46" actId="1076"/>
       <pc:docMkLst>
         <pc:docMk/>
       </pc:docMkLst>
-      <pc:sldChg chg="modSp mod">
-        <pc:chgData name="Hanna Bokariuk" userId="fd5399e8-0949-4b9d-b255-fc007b27d60c" providerId="ADAL" clId="{8C1C02D4-1D0A-483D-B224-A1E06DCB062F}" dt="2026-10-05T22:30:04.809" v="2" actId="1076"/>
+      <pc:sldChg chg="addSp delSp modSp mod modAnim">
+        <pc:chgData name="Hanna Bokariuk" userId="fd5399e8-0949-4b9d-b255-fc007b27d60c" providerId="ADAL" clId="{8C1C02D4-1D0A-483D-B224-A1E06DCB062F}" dt="2026-10-06T07:56:36.618" v="46" actId="1076"/>
         <pc:sldMkLst>
           <pc:docMk/>
           <pc:sldMk cId="0" sldId="256"/>
         </pc:sldMkLst>
+        <pc:spChg chg="add del mod ord">
+          <ac:chgData name="Hanna Bokariuk" userId="fd5399e8-0949-4b9d-b255-fc007b27d60c" providerId="ADAL" clId="{8C1C02D4-1D0A-483D-B224-A1E06DCB062F}" dt="2026-10-06T07:56:36.618" v="46" actId="1076"/>
+          <ac:spMkLst>
+            <pc:docMk/>
+            <pc:sldMk cId="0" sldId="256"/>
+            <ac:spMk id="2" creationId="{00000000-0000-0000-0000-000000000000}"/>
+          </ac:spMkLst>
+        </pc:spChg>
         <pc:spChg chg="mod">
           <ac:chgData name="Hanna Bokariuk" userId="fd5399e8-0949-4b9d-b255-fc007b27d60c" providerId="ADAL" clId="{8C1C02D4-1D0A-483D-B224-A1E06DCB062F}" dt="2026-10-05T22:30:04.809" v="2" actId="1076"/>
           <ac:spMkLst>
@@ -136,11 +153,226 @@
           </ac:spMkLst>
         </pc:spChg>
         <pc:spChg chg="mod">
+          <ac:chgData name="Hanna Bokariuk" userId="fd5399e8-0949-4b9d-b255-fc007b27d60c" providerId="ADAL" clId="{8C1C02D4-1D0A-483D-B224-A1E06DCB062F}" dt="2026-10-06T07:53:17.626" v="32" actId="164"/>
+          <ac:spMkLst>
+            <pc:docMk/>
+            <pc:sldMk cId="0" sldId="256"/>
+            <ac:spMk id="8" creationId="{00000000-0000-0000-0000-000000000000}"/>
+          </ac:spMkLst>
+        </pc:spChg>
+        <pc:spChg chg="mod">
+          <ac:chgData name="Hanna Bokariuk" userId="fd5399e8-0949-4b9d-b255-fc007b27d60c" providerId="ADAL" clId="{8C1C02D4-1D0A-483D-B224-A1E06DCB062F}" dt="2026-10-06T07:53:17.626" v="32" actId="164"/>
+          <ac:spMkLst>
+            <pc:docMk/>
+            <pc:sldMk cId="0" sldId="256"/>
+            <ac:spMk id="9" creationId="{00000000-0000-0000-0000-000000000000}"/>
+          </ac:spMkLst>
+        </pc:spChg>
+        <pc:spChg chg="mod">
+          <ac:chgData name="Hanna Bokariuk" userId="fd5399e8-0949-4b9d-b255-fc007b27d60c" providerId="ADAL" clId="{8C1C02D4-1D0A-483D-B224-A1E06DCB062F}" dt="2026-10-06T07:53:17.626" v="32" actId="164"/>
+          <ac:spMkLst>
+            <pc:docMk/>
+            <pc:sldMk cId="0" sldId="256"/>
+            <ac:spMk id="10" creationId="{00000000-0000-0000-0000-000000000000}"/>
+          </ac:spMkLst>
+        </pc:spChg>
+        <pc:spChg chg="mod">
+          <ac:chgData name="Hanna Bokariuk" userId="fd5399e8-0949-4b9d-b255-fc007b27d60c" providerId="ADAL" clId="{8C1C02D4-1D0A-483D-B224-A1E06DCB062F}" dt="2026-10-06T07:53:17.626" v="32" actId="164"/>
+          <ac:spMkLst>
+            <pc:docMk/>
+            <pc:sldMk cId="0" sldId="256"/>
+            <ac:spMk id="11" creationId="{00000000-0000-0000-0000-000000000000}"/>
+          </ac:spMkLst>
+        </pc:spChg>
+        <pc:spChg chg="mod">
+          <ac:chgData name="Hanna Bokariuk" userId="fd5399e8-0949-4b9d-b255-fc007b27d60c" providerId="ADAL" clId="{8C1C02D4-1D0A-483D-B224-A1E06DCB062F}" dt="2026-10-06T07:53:17.626" v="32" actId="164"/>
+          <ac:spMkLst>
+            <pc:docMk/>
+            <pc:sldMk cId="0" sldId="256"/>
+            <ac:spMk id="12" creationId="{00000000-0000-0000-0000-000000000000}"/>
+          </ac:spMkLst>
+        </pc:spChg>
+        <pc:spChg chg="mod">
+          <ac:chgData name="Hanna Bokariuk" userId="fd5399e8-0949-4b9d-b255-fc007b27d60c" providerId="ADAL" clId="{8C1C02D4-1D0A-483D-B224-A1E06DCB062F}" dt="2026-10-06T07:52:11.583" v="25" actId="164"/>
+          <ac:spMkLst>
+            <pc:docMk/>
+            <pc:sldMk cId="0" sldId="256"/>
+            <ac:spMk id="13" creationId="{00000000-0000-0000-0000-000000000000}"/>
+          </ac:spMkLst>
+        </pc:spChg>
+        <pc:spChg chg="mod">
+          <ac:chgData name="Hanna Bokariuk" userId="fd5399e8-0949-4b9d-b255-fc007b27d60c" providerId="ADAL" clId="{8C1C02D4-1D0A-483D-B224-A1E06DCB062F}" dt="2026-10-06T07:52:11.583" v="25" actId="164"/>
+          <ac:spMkLst>
+            <pc:docMk/>
+            <pc:sldMk cId="0" sldId="256"/>
+            <ac:spMk id="14" creationId="{00000000-0000-0000-0000-000000000000}"/>
+          </ac:spMkLst>
+        </pc:spChg>
+        <pc:spChg chg="mod">
+          <ac:chgData name="Hanna Bokariuk" userId="fd5399e8-0949-4b9d-b255-fc007b27d60c" providerId="ADAL" clId="{8C1C02D4-1D0A-483D-B224-A1E06DCB062F}" dt="2026-10-06T07:52:11.583" v="25" actId="164"/>
+          <ac:spMkLst>
+            <pc:docMk/>
+            <pc:sldMk cId="0" sldId="256"/>
+            <ac:spMk id="15" creationId="{00000000-0000-0000-0000-000000000000}"/>
+          </ac:spMkLst>
+        </pc:spChg>
+        <pc:spChg chg="mod">
+          <ac:chgData name="Hanna Bokariuk" userId="fd5399e8-0949-4b9d-b255-fc007b27d60c" providerId="ADAL" clId="{8C1C02D4-1D0A-483D-B224-A1E06DCB062F}" dt="2026-10-06T07:52:11.583" v="25" actId="164"/>
+          <ac:spMkLst>
+            <pc:docMk/>
+            <pc:sldMk cId="0" sldId="256"/>
+            <ac:spMk id="16" creationId="{00000000-0000-0000-0000-000000000000}"/>
+          </ac:spMkLst>
+        </pc:spChg>
+        <pc:spChg chg="mod">
+          <ac:chgData name="Hanna Bokariuk" userId="fd5399e8-0949-4b9d-b255-fc007b27d60c" providerId="ADAL" clId="{8C1C02D4-1D0A-483D-B224-A1E06DCB062F}" dt="2026-10-06T07:52:11.583" v="25" actId="164"/>
+          <ac:spMkLst>
+            <pc:docMk/>
+            <pc:sldMk cId="0" sldId="256"/>
+            <ac:spMk id="17" creationId="{00000000-0000-0000-0000-000000000000}"/>
+          </ac:spMkLst>
+        </pc:spChg>
+        <pc:spChg chg="mod">
+          <ac:chgData name="Hanna Bokariuk" userId="fd5399e8-0949-4b9d-b255-fc007b27d60c" providerId="ADAL" clId="{8C1C02D4-1D0A-483D-B224-A1E06DCB062F}" dt="2026-10-06T07:51:55.819" v="24" actId="164"/>
+          <ac:spMkLst>
+            <pc:docMk/>
+            <pc:sldMk cId="0" sldId="256"/>
+            <ac:spMk id="18" creationId="{00000000-0000-0000-0000-000000000000}"/>
+          </ac:spMkLst>
+        </pc:spChg>
+        <pc:spChg chg="mod">
+          <ac:chgData name="Hanna Bokariuk" userId="fd5399e8-0949-4b9d-b255-fc007b27d60c" providerId="ADAL" clId="{8C1C02D4-1D0A-483D-B224-A1E06DCB062F}" dt="2026-10-06T07:51:55.819" v="24" actId="164"/>
+          <ac:spMkLst>
+            <pc:docMk/>
+            <pc:sldMk cId="0" sldId="256"/>
+            <ac:spMk id="19" creationId="{00000000-0000-0000-0000-000000000000}"/>
+          </ac:spMkLst>
+        </pc:spChg>
+        <pc:spChg chg="mod">
+          <ac:chgData name="Hanna Bokariuk" userId="fd5399e8-0949-4b9d-b255-fc007b27d60c" providerId="ADAL" clId="{8C1C02D4-1D0A-483D-B224-A1E06DCB062F}" dt="2026-10-06T07:51:55.819" v="24" actId="164"/>
+          <ac:spMkLst>
+            <pc:docMk/>
+            <pc:sldMk cId="0" sldId="256"/>
+            <ac:spMk id="20" creationId="{00000000-0000-0000-0000-000000000000}"/>
+          </ac:spMkLst>
+        </pc:spChg>
+        <pc:spChg chg="mod">
+          <ac:chgData name="Hanna Bokariuk" userId="fd5399e8-0949-4b9d-b255-fc007b27d60c" providerId="ADAL" clId="{8C1C02D4-1D0A-483D-B224-A1E06DCB062F}" dt="2026-10-06T07:51:55.819" v="24" actId="164"/>
+          <ac:spMkLst>
+            <pc:docMk/>
+            <pc:sldMk cId="0" sldId="256"/>
+            <ac:spMk id="21" creationId="{00000000-0000-0000-0000-000000000000}"/>
+          </ac:spMkLst>
+        </pc:spChg>
+        <pc:spChg chg="mod">
+          <ac:chgData name="Hanna Bokariuk" userId="fd5399e8-0949-4b9d-b255-fc007b27d60c" providerId="ADAL" clId="{8C1C02D4-1D0A-483D-B224-A1E06DCB062F}" dt="2026-10-06T07:51:55.819" v="24" actId="164"/>
+          <ac:spMkLst>
+            <pc:docMk/>
+            <pc:sldMk cId="0" sldId="256"/>
+            <ac:spMk id="22" creationId="{00000000-0000-0000-0000-000000000000}"/>
+          </ac:spMkLst>
+        </pc:spChg>
+        <pc:spChg chg="mod">
+          <ac:chgData name="Hanna Bokariuk" userId="fd5399e8-0949-4b9d-b255-fc007b27d60c" providerId="ADAL" clId="{8C1C02D4-1D0A-483D-B224-A1E06DCB062F}" dt="2026-10-06T07:56:18.513" v="44" actId="164"/>
+          <ac:spMkLst>
+            <pc:docMk/>
+            <pc:sldMk cId="0" sldId="256"/>
+            <ac:spMk id="23" creationId="{00000000-0000-0000-0000-000000000000}"/>
+          </ac:spMkLst>
+        </pc:spChg>
+        <pc:spChg chg="mod">
+          <ac:chgData name="Hanna Bokariuk" userId="fd5399e8-0949-4b9d-b255-fc007b27d60c" providerId="ADAL" clId="{8C1C02D4-1D0A-483D-B224-A1E06DCB062F}" dt="2026-10-06T07:56:18.513" v="44" actId="164"/>
+          <ac:spMkLst>
+            <pc:docMk/>
+            <pc:sldMk cId="0" sldId="256"/>
+            <ac:spMk id="24" creationId="{00000000-0000-0000-0000-000000000000}"/>
+          </ac:spMkLst>
+        </pc:spChg>
+        <pc:spChg chg="mod">
+          <ac:chgData name="Hanna Bokariuk" userId="fd5399e8-0949-4b9d-b255-fc007b27d60c" providerId="ADAL" clId="{8C1C02D4-1D0A-483D-B224-A1E06DCB062F}" dt="2026-10-06T07:56:18.513" v="44" actId="164"/>
+          <ac:spMkLst>
+            <pc:docMk/>
+            <pc:sldMk cId="0" sldId="256"/>
+            <ac:spMk id="25" creationId="{00000000-0000-0000-0000-000000000000}"/>
+          </ac:spMkLst>
+        </pc:spChg>
+        <pc:spChg chg="mod">
+          <ac:chgData name="Hanna Bokariuk" userId="fd5399e8-0949-4b9d-b255-fc007b27d60c" providerId="ADAL" clId="{8C1C02D4-1D0A-483D-B224-A1E06DCB062F}" dt="2026-10-06T07:56:18.513" v="44" actId="164"/>
+          <ac:spMkLst>
+            <pc:docMk/>
+            <pc:sldMk cId="0" sldId="256"/>
+            <ac:spMk id="26" creationId="{00000000-0000-0000-0000-000000000000}"/>
+          </ac:spMkLst>
+        </pc:spChg>
+        <pc:spChg chg="mod">
+          <ac:chgData name="Hanna Bokariuk" userId="fd5399e8-0949-4b9d-b255-fc007b27d60c" providerId="ADAL" clId="{8C1C02D4-1D0A-483D-B224-A1E06DCB062F}" dt="2026-10-06T07:56:18.513" v="44" actId="164"/>
+          <ac:spMkLst>
+            <pc:docMk/>
+            <pc:sldMk cId="0" sldId="256"/>
+            <ac:spMk id="27" creationId="{00000000-0000-0000-0000-000000000000}"/>
+          </ac:spMkLst>
+        </pc:spChg>
+        <pc:spChg chg="mod">
           <ac:chgData name="Hanna Bokariuk" userId="fd5399e8-0949-4b9d-b255-fc007b27d60c" providerId="ADAL" clId="{8C1C02D4-1D0A-483D-B224-A1E06DCB062F}" dt="2026-10-05T22:29:57.236" v="1" actId="1076"/>
           <ac:spMkLst>
             <pc:docMk/>
             <pc:sldMk cId="0" sldId="256"/>
             <ac:spMk id="29" creationId="{A6127068-4B25-9293-33A4-97EF49858F13}"/>
+          </ac:spMkLst>
+        </pc:spChg>
+        <pc:grpChg chg="add mod">
+          <ac:chgData name="Hanna Bokariuk" userId="fd5399e8-0949-4b9d-b255-fc007b27d60c" providerId="ADAL" clId="{8C1C02D4-1D0A-483D-B224-A1E06DCB062F}" dt="2026-10-06T07:51:25.562" v="22" actId="164"/>
+          <ac:grpSpMkLst>
+            <pc:docMk/>
+            <pc:sldMk cId="0" sldId="256"/>
+            <ac:grpSpMk id="28" creationId="{6509B96E-BDA4-7EE7-5854-69521607260E}"/>
+          </ac:grpSpMkLst>
+        </pc:grpChg>
+        <pc:grpChg chg="add mod">
+          <ac:chgData name="Hanna Bokariuk" userId="fd5399e8-0949-4b9d-b255-fc007b27d60c" providerId="ADAL" clId="{8C1C02D4-1D0A-483D-B224-A1E06DCB062F}" dt="2026-10-06T07:51:55.819" v="24" actId="164"/>
+          <ac:grpSpMkLst>
+            <pc:docMk/>
+            <pc:sldMk cId="0" sldId="256"/>
+            <ac:grpSpMk id="30" creationId="{FFB08D8C-4489-86E2-0084-10A640D248DC}"/>
+          </ac:grpSpMkLst>
+        </pc:grpChg>
+        <pc:grpChg chg="add mod">
+          <ac:chgData name="Hanna Bokariuk" userId="fd5399e8-0949-4b9d-b255-fc007b27d60c" providerId="ADAL" clId="{8C1C02D4-1D0A-483D-B224-A1E06DCB062F}" dt="2026-10-06T07:52:11.583" v="25" actId="164"/>
+          <ac:grpSpMkLst>
+            <pc:docMk/>
+            <pc:sldMk cId="0" sldId="256"/>
+            <ac:grpSpMk id="31" creationId="{18270035-8730-62D3-59B1-01B98DDCD359}"/>
+          </ac:grpSpMkLst>
+        </pc:grpChg>
+        <pc:grpChg chg="add mod">
+          <ac:chgData name="Hanna Bokariuk" userId="fd5399e8-0949-4b9d-b255-fc007b27d60c" providerId="ADAL" clId="{8C1C02D4-1D0A-483D-B224-A1E06DCB062F}" dt="2026-10-06T07:53:17.626" v="32" actId="164"/>
+          <ac:grpSpMkLst>
+            <pc:docMk/>
+            <pc:sldMk cId="0" sldId="256"/>
+            <ac:grpSpMk id="32" creationId="{416ACE97-F67E-92FE-EC9E-8E5029918450}"/>
+          </ac:grpSpMkLst>
+        </pc:grpChg>
+        <pc:grpChg chg="add mod">
+          <ac:chgData name="Hanna Bokariuk" userId="fd5399e8-0949-4b9d-b255-fc007b27d60c" providerId="ADAL" clId="{8C1C02D4-1D0A-483D-B224-A1E06DCB062F}" dt="2026-10-06T07:56:18.513" v="44" actId="164"/>
+          <ac:grpSpMkLst>
+            <pc:docMk/>
+            <pc:sldMk cId="0" sldId="256"/>
+            <ac:grpSpMk id="33" creationId="{5A66D382-E3E3-9C5D-23E5-4A63E50CD3DE}"/>
+          </ac:grpSpMkLst>
+        </pc:grpChg>
+      </pc:sldChg>
+      <pc:sldChg chg="delSp modSp mod">
+        <pc:chgData name="Hanna Bokariuk" userId="fd5399e8-0949-4b9d-b255-fc007b27d60c" providerId="ADAL" clId="{8C1C02D4-1D0A-483D-B224-A1E06DCB062F}" dt="2026-10-06T07:49:44.289" v="19" actId="478"/>
+        <pc:sldMkLst>
+          <pc:docMk/>
+          <pc:sldMk cId="1346267894" sldId="257"/>
+        </pc:sldMkLst>
+        <pc:spChg chg="del mod">
+          <ac:chgData name="Hanna Bokariuk" userId="fd5399e8-0949-4b9d-b255-fc007b27d60c" providerId="ADAL" clId="{8C1C02D4-1D0A-483D-B224-A1E06DCB062F}" dt="2026-10-06T07:49:44.289" v="19" actId="478"/>
+          <ac:spMkLst>
+            <pc:docMk/>
+            <pc:sldMk cId="1346267894" sldId="257"/>
+            <ac:spMk id="2" creationId="{00000000-0000-0000-0000-000000000000}"/>
           </ac:spMkLst>
         </pc:spChg>
       </pc:sldChg>
@@ -340,6 +572,90 @@
             <a:fld id="{F7021451-1387-4CA6-816F-3879F97B5CBC}" type="slidenum">
               <a:rPr lang="en-US"/>
               <a:t>1</a:t>
+            </a:fld>
+            <a:endParaRPr lang="en-US"/>
+          </a:p>
+        </p:txBody>
+      </p:sp>
+    </p:spTree>
+    <p:extLst>
+      <p:ext uri="{BB962C8B-B14F-4D97-AF65-F5344CB8AC3E}">
+        <p14:creationId xmlns:p14="http://schemas.microsoft.com/office/powerpoint/2010/main" val="1024086991"/>
+      </p:ext>
+    </p:extLst>
+  </p:cSld>
+  <p:clrMapOvr>
+    <a:masterClrMapping/>
+  </p:clrMapOvr>
+</p:notes>
+</file>
+
+<file path=ppt/notesSlides/notesSlide2.xml><?xml version="1.0" encoding="utf-8"?>
+<p:notes xmlns:a="http://schemas.openxmlformats.org/drawingml/2006/main" xmlns:r="http://schemas.openxmlformats.org/officeDocument/2006/relationships" xmlns:p="http://schemas.openxmlformats.org/presentationml/2006/main">
+  <p:cSld>
+    <p:spTree>
+      <p:nvGrpSpPr>
+        <p:cNvPr id="1" name=""/>
+        <p:cNvGrpSpPr/>
+        <p:nvPr/>
+      </p:nvGrpSpPr>
+      <p:grpSpPr>
+        <a:xfrm>
+          <a:off x="0" y="0"/>
+          <a:ext cx="0" cy="0"/>
+          <a:chOff x="0" y="0"/>
+          <a:chExt cx="0" cy="0"/>
+        </a:xfrm>
+      </p:grpSpPr>
+      <p:sp>
+        <p:nvSpPr>
+          <p:cNvPr id="2" name="Slide Image Placeholder 1"/>
+          <p:cNvSpPr>
+            <a:spLocks noGrp="1" noRot="1" noChangeAspect="1"/>
+          </p:cNvSpPr>
+          <p:nvPr>
+            <p:ph type="sldImg"/>
+          </p:nvPr>
+        </p:nvSpPr>
+        <p:spPr/>
+      </p:sp>
+      <p:sp>
+        <p:nvSpPr>
+          <p:cNvPr id="3" name="Notes Placeholder 2"/>
+          <p:cNvSpPr>
+            <a:spLocks noGrp="1"/>
+          </p:cNvSpPr>
+          <p:nvPr>
+            <p:ph type="body" idx="1"/>
+          </p:nvPr>
+        </p:nvSpPr>
+        <p:spPr/>
+        <p:txBody>
+          <a:bodyPr/>
+          <a:lstStyle/>
+          <a:p>
+            <a:endParaRPr lang="en-US" dirty="0"/>
+          </a:p>
+        </p:txBody>
+      </p:sp>
+      <p:sp>
+        <p:nvSpPr>
+          <p:cNvPr id="4" name="Slide Number Placeholder 3"/>
+          <p:cNvSpPr>
+            <a:spLocks noGrp="1"/>
+          </p:cNvSpPr>
+          <p:nvPr>
+            <p:ph type="sldNum" sz="quarter" idx="10"/>
+          </p:nvPr>
+        </p:nvSpPr>
+        <p:spPr/>
+        <p:txBody>
+          <a:bodyPr/>
+          <a:lstStyle/>
+          <a:p>
+            <a:fld id="{F7021451-1387-4CA6-816F-3879F97B5CBC}" type="slidenum">
+              <a:rPr lang="en-US"/>
+              <a:t>2</a:t>
             </a:fld>
             <a:endParaRPr lang="en-US"/>
           </a:p>
@@ -703,8 +1019,8 @@
         </p:nvSpPr>
         <p:spPr>
           <a:xfrm>
-            <a:off x="91440" y="73152"/>
-            <a:ext cx="12006072" cy="6702552"/>
+            <a:off x="81225" y="98503"/>
+            <a:ext cx="11930888" cy="6583680"/>
           </a:xfrm>
           <a:prstGeom prst="roundRect">
             <a:avLst>
@@ -736,6 +1052,1553 @@
           </a:p>
         </p:txBody>
       </p:sp>
+      <p:pic>
+        <p:nvPicPr>
+          <p:cNvPr id="3" name="Image 0" descr="/mnt/data/tempsafe_photo_panel_crop.png"/>
+          <p:cNvPicPr>
+            <a:picLocks noChangeAspect="1"/>
+          </p:cNvPicPr>
+          <p:nvPr/>
+        </p:nvPicPr>
+        <p:blipFill>
+          <a:blip r:embed="rId3"/>
+          <a:stretch>
+            <a:fillRect/>
+          </a:stretch>
+        </p:blipFill>
+        <p:spPr>
+          <a:xfrm>
+            <a:off x="164592" y="137160"/>
+            <a:ext cx="3346704" cy="6565392"/>
+          </a:xfrm>
+          <a:prstGeom prst="rect">
+            <a:avLst/>
+          </a:prstGeom>
+        </p:spPr>
+      </p:pic>
+      <p:sp>
+        <p:nvSpPr>
+          <p:cNvPr id="4" name="Shape 1"/>
+          <p:cNvSpPr/>
+          <p:nvPr/>
+        </p:nvSpPr>
+        <p:spPr>
+          <a:xfrm>
+            <a:off x="3602736" y="182880"/>
+            <a:ext cx="18288" cy="6492240"/>
+          </a:xfrm>
+          <a:prstGeom prst="rect">
+            <a:avLst/>
+          </a:prstGeom>
+          <a:solidFill>
+            <a:srgbClr val="EEEAF6"/>
+          </a:solidFill>
+          <a:ln w="12700">
+            <a:solidFill>
+              <a:srgbClr val="EEEAF6">
+                <a:alpha val="0"/>
+              </a:srgbClr>
+            </a:solidFill>
+            <a:prstDash val="solid"/>
+          </a:ln>
+        </p:spPr>
+        <p:txBody>
+          <a:bodyPr/>
+          <a:lstStyle/>
+          <a:p>
+            <a:endParaRPr lang="en-IE"/>
+          </a:p>
+        </p:txBody>
+      </p:sp>
+      <p:sp>
+        <p:nvSpPr>
+          <p:cNvPr id="5" name="Text 2"/>
+          <p:cNvSpPr/>
+          <p:nvPr/>
+        </p:nvSpPr>
+        <p:spPr>
+          <a:xfrm>
+            <a:off x="3794760" y="315468"/>
+            <a:ext cx="7589520" cy="685800"/>
+          </a:xfrm>
+          <a:prstGeom prst="rect">
+            <a:avLst/>
+          </a:prstGeom>
+          <a:noFill/>
+          <a:ln/>
+        </p:spPr>
+        <p:txBody>
+          <a:bodyPr wrap="square" lIns="0" tIns="0" rIns="0" bIns="0" rtlCol="0" anchor="t">
+            <a:normAutofit/>
+          </a:bodyPr>
+          <a:lstStyle/>
+          <a:p>
+            <a:pPr marL="0" indent="0" algn="l">
+              <a:buNone/>
+            </a:pPr>
+            <a:r>
+              <a:rPr lang="en-US" sz="4400" b="1" dirty="0">
+                <a:solidFill>
+                  <a:srgbClr val="142C86"/>
+                </a:solidFill>
+                <a:latin typeface="Aptos Display" pitchFamily="34" charset="0"/>
+                <a:ea typeface="Aptos Display" pitchFamily="34" charset="-122"/>
+                <a:cs typeface="Aptos Display" pitchFamily="34" charset="-120"/>
+              </a:rPr>
+              <a:t>TempSafe</a:t>
+            </a:r>
+            <a:endParaRPr lang="en-US" sz="4400" dirty="0"/>
+          </a:p>
+        </p:txBody>
+      </p:sp>
+      <p:sp>
+        <p:nvSpPr>
+          <p:cNvPr id="6" name="Text 3"/>
+          <p:cNvSpPr/>
+          <p:nvPr/>
+        </p:nvSpPr>
+        <p:spPr>
+          <a:xfrm>
+            <a:off x="4421632" y="958404"/>
+            <a:ext cx="7680960" cy="384048"/>
+          </a:xfrm>
+          <a:prstGeom prst="rect">
+            <a:avLst/>
+          </a:prstGeom>
+          <a:noFill/>
+          <a:ln/>
+        </p:spPr>
+        <p:txBody>
+          <a:bodyPr wrap="square" lIns="0" tIns="0" rIns="0" bIns="0" rtlCol="0" anchor="t">
+            <a:normAutofit/>
+          </a:bodyPr>
+          <a:lstStyle/>
+          <a:p>
+            <a:pPr marL="0" indent="0" algn="l">
+              <a:buNone/>
+            </a:pPr>
+            <a:r>
+              <a:rPr lang="en-US" sz="2200" b="1" dirty="0">
+                <a:solidFill>
+                  <a:srgbClr val="1D3D9C"/>
+                </a:solidFill>
+                <a:latin typeface="Aptos" pitchFamily="34" charset="0"/>
+                <a:ea typeface="Aptos" pitchFamily="34" charset="-122"/>
+                <a:cs typeface="Aptos" pitchFamily="34" charset="-120"/>
+              </a:rPr>
+              <a:t>Smart temperature monitoring for a Controlled Drug Box</a:t>
+            </a:r>
+            <a:endParaRPr lang="en-US" sz="2200" dirty="0"/>
+          </a:p>
+        </p:txBody>
+      </p:sp>
+      <p:sp>
+        <p:nvSpPr>
+          <p:cNvPr id="7" name="Text 4"/>
+          <p:cNvSpPr/>
+          <p:nvPr/>
+        </p:nvSpPr>
+        <p:spPr>
+          <a:xfrm>
+            <a:off x="3886200" y="1138428"/>
+            <a:ext cx="7744968" cy="1458468"/>
+          </a:xfrm>
+          <a:prstGeom prst="rect">
+            <a:avLst/>
+          </a:prstGeom>
+          <a:noFill/>
+          <a:ln/>
+        </p:spPr>
+        <p:txBody>
+          <a:bodyPr wrap="square" lIns="0" tIns="0" rIns="0" bIns="0" rtlCol="0" anchor="t">
+            <a:normAutofit/>
+          </a:bodyPr>
+          <a:lstStyle/>
+          <a:p>
+            <a:pPr marL="0" indent="0" algn="l">
+              <a:buNone/>
+            </a:pPr>
+            <a:endParaRPr lang="en-US" sz="1550" dirty="0"/>
+          </a:p>
+        </p:txBody>
+      </p:sp>
+      <p:grpSp>
+        <p:nvGrpSpPr>
+          <p:cNvPr id="32" name="Group 31">
+            <a:extLst>
+              <a:ext uri="{FF2B5EF4-FFF2-40B4-BE49-F238E27FC236}">
+                <a16:creationId xmlns:a16="http://schemas.microsoft.com/office/drawing/2014/main" id="{416ACE97-F67E-92FE-EC9E-8E5029918450}"/>
+              </a:ext>
+            </a:extLst>
+          </p:cNvPr>
+          <p:cNvGrpSpPr/>
+          <p:nvPr/>
+        </p:nvGrpSpPr>
+        <p:grpSpPr>
+          <a:xfrm>
+            <a:off x="3936492" y="4050792"/>
+            <a:ext cx="2514600" cy="1691640"/>
+            <a:chOff x="3936492" y="4050792"/>
+            <a:chExt cx="2514600" cy="1691640"/>
+          </a:xfrm>
+        </p:grpSpPr>
+        <p:sp>
+          <p:nvSpPr>
+            <p:cNvPr id="8" name="Shape 5"/>
+            <p:cNvSpPr/>
+            <p:nvPr/>
+          </p:nvSpPr>
+          <p:spPr>
+            <a:xfrm>
+              <a:off x="3936492" y="4050792"/>
+              <a:ext cx="2514600" cy="1691640"/>
+            </a:xfrm>
+            <a:prstGeom prst="roundRect">
+              <a:avLst>
+                <a:gd name="adj" fmla="val 5946"/>
+              </a:avLst>
+            </a:prstGeom>
+            <a:solidFill>
+              <a:srgbClr val="FFFFFF"/>
+            </a:solidFill>
+            <a:ln w="8890">
+              <a:solidFill>
+                <a:srgbClr val="E3DDF0"/>
+              </a:solidFill>
+              <a:prstDash val="solid"/>
+            </a:ln>
+            <a:effectLst>
+              <a:outerShdw blurRad="25400" dist="50800" dir="2700000" algn="bl" rotWithShape="0">
+                <a:srgbClr val="B7AACD">
+                  <a:alpha val="28000"/>
+                </a:srgbClr>
+              </a:outerShdw>
+            </a:effectLst>
+          </p:spPr>
+          <p:txBody>
+            <a:bodyPr/>
+            <a:lstStyle/>
+            <a:p>
+              <a:endParaRPr lang="en-IE"/>
+            </a:p>
+          </p:txBody>
+        </p:sp>
+        <p:sp>
+          <p:nvSpPr>
+            <p:cNvPr id="9" name="Shape 6"/>
+            <p:cNvSpPr/>
+            <p:nvPr/>
+          </p:nvSpPr>
+          <p:spPr>
+            <a:xfrm>
+              <a:off x="3965331" y="4082797"/>
+              <a:ext cx="530352" cy="530352"/>
+            </a:xfrm>
+            <a:prstGeom prst="ellipse">
+              <a:avLst/>
+            </a:prstGeom>
+            <a:solidFill>
+              <a:srgbClr val="ECEBFF"/>
+            </a:solidFill>
+            <a:ln w="12700">
+              <a:solidFill>
+                <a:srgbClr val="ECEBFF">
+                  <a:alpha val="0"/>
+                </a:srgbClr>
+              </a:solidFill>
+              <a:prstDash val="solid"/>
+            </a:ln>
+          </p:spPr>
+          <p:txBody>
+            <a:bodyPr/>
+            <a:lstStyle/>
+            <a:p>
+              <a:endParaRPr lang="en-IE"/>
+            </a:p>
+          </p:txBody>
+        </p:sp>
+        <p:sp>
+          <p:nvSpPr>
+            <p:cNvPr id="10" name="Text 7"/>
+            <p:cNvSpPr/>
+            <p:nvPr/>
+          </p:nvSpPr>
+          <p:spPr>
+            <a:xfrm>
+              <a:off x="4041648" y="4133088"/>
+              <a:ext cx="420624" cy="411480"/>
+            </a:xfrm>
+            <a:prstGeom prst="rect">
+              <a:avLst/>
+            </a:prstGeom>
+            <a:noFill/>
+            <a:ln/>
+          </p:spPr>
+          <p:txBody>
+            <a:bodyPr wrap="square" lIns="0" tIns="0" rIns="0" bIns="0" rtlCol="0" anchor="ctr">
+              <a:normAutofit/>
+            </a:bodyPr>
+            <a:lstStyle/>
+            <a:p>
+              <a:pPr marL="0" indent="0" algn="ctr">
+                <a:buNone/>
+              </a:pPr>
+              <a:r>
+                <a:rPr lang="en-US" sz="2200" dirty="0">
+                  <a:solidFill>
+                    <a:srgbClr val="1D3D9C"/>
+                  </a:solidFill>
+                  <a:latin typeface="Aptos" pitchFamily="34" charset="0"/>
+                  <a:ea typeface="Aptos" pitchFamily="34" charset="-122"/>
+                  <a:cs typeface="Aptos" pitchFamily="34" charset="-120"/>
+                </a:rPr>
+                <a:t>♨</a:t>
+              </a:r>
+              <a:endParaRPr lang="en-US" sz="2200" dirty="0"/>
+            </a:p>
+          </p:txBody>
+        </p:sp>
+        <p:sp>
+          <p:nvSpPr>
+            <p:cNvPr id="11" name="Text 8"/>
+            <p:cNvSpPr/>
+            <p:nvPr/>
+          </p:nvSpPr>
+          <p:spPr>
+            <a:xfrm>
+              <a:off x="4654296" y="4179617"/>
+              <a:ext cx="1637640" cy="559991"/>
+            </a:xfrm>
+            <a:prstGeom prst="rect">
+              <a:avLst/>
+            </a:prstGeom>
+            <a:noFill/>
+            <a:ln/>
+          </p:spPr>
+          <p:txBody>
+            <a:bodyPr wrap="square" lIns="0" tIns="0" rIns="0" bIns="0" rtlCol="0" anchor="t">
+              <a:noAutofit/>
+            </a:bodyPr>
+            <a:lstStyle/>
+            <a:p>
+              <a:pPr marL="0" indent="0" algn="l">
+                <a:buNone/>
+              </a:pPr>
+              <a:r>
+                <a:rPr lang="en-US" b="1" dirty="0">
+                  <a:solidFill>
+                    <a:srgbClr val="1D3D9C"/>
+                  </a:solidFill>
+                  <a:latin typeface="Aptos" pitchFamily="34" charset="0"/>
+                  <a:ea typeface="Aptos" pitchFamily="34" charset="-122"/>
+                  <a:cs typeface="Aptos" pitchFamily="34" charset="-120"/>
+                </a:rPr>
+                <a:t>Continuous </a:t>
+              </a:r>
+            </a:p>
+            <a:p>
+              <a:pPr marL="0" indent="0" algn="l">
+                <a:buNone/>
+              </a:pPr>
+              <a:r>
+                <a:rPr lang="en-US" b="1" dirty="0">
+                  <a:solidFill>
+                    <a:srgbClr val="1D3D9C"/>
+                  </a:solidFill>
+                  <a:latin typeface="Aptos" pitchFamily="34" charset="0"/>
+                  <a:ea typeface="Aptos" pitchFamily="34" charset="-122"/>
+                  <a:cs typeface="Aptos" pitchFamily="34" charset="-120"/>
+                </a:rPr>
+                <a:t>Monitoring</a:t>
+              </a:r>
+              <a:endParaRPr lang="en-US" dirty="0"/>
+            </a:p>
+          </p:txBody>
+        </p:sp>
+        <p:sp>
+          <p:nvSpPr>
+            <p:cNvPr id="12" name="Text 9"/>
+            <p:cNvSpPr/>
+            <p:nvPr/>
+          </p:nvSpPr>
+          <p:spPr>
+            <a:xfrm>
+              <a:off x="4053078" y="4757026"/>
+              <a:ext cx="2331720" cy="724455"/>
+            </a:xfrm>
+            <a:prstGeom prst="rect">
+              <a:avLst/>
+            </a:prstGeom>
+            <a:noFill/>
+            <a:ln/>
+          </p:spPr>
+          <p:txBody>
+            <a:bodyPr wrap="square" lIns="0" tIns="0" rIns="0" bIns="0" rtlCol="0" anchor="t">
+              <a:normAutofit lnSpcReduction="10000"/>
+            </a:bodyPr>
+            <a:lstStyle/>
+            <a:p>
+              <a:pPr marL="0" indent="0" algn="l">
+                <a:buNone/>
+              </a:pPr>
+              <a:r>
+                <a:rPr lang="en-US" sz="1600" dirty="0">
+                  <a:solidFill>
+                    <a:srgbClr val="5F6375"/>
+                  </a:solidFill>
+                  <a:latin typeface="Aptos" pitchFamily="34" charset="0"/>
+                  <a:ea typeface="Aptos" pitchFamily="34" charset="-122"/>
+                  <a:cs typeface="Aptos" pitchFamily="34" charset="-120"/>
+                </a:rPr>
+                <a:t>Tracks temperature inside the Controlled Drug Box in real time</a:t>
+              </a:r>
+              <a:r>
+                <a:rPr lang="en-US" sz="1260" dirty="0">
+                  <a:solidFill>
+                    <a:srgbClr val="5F6375"/>
+                  </a:solidFill>
+                  <a:latin typeface="Aptos" pitchFamily="34" charset="0"/>
+                  <a:ea typeface="Aptos" pitchFamily="34" charset="-122"/>
+                  <a:cs typeface="Aptos" pitchFamily="34" charset="-120"/>
+                </a:rPr>
+                <a:t>.</a:t>
+              </a:r>
+              <a:endParaRPr lang="en-US" sz="1260" dirty="0"/>
+            </a:p>
+          </p:txBody>
+        </p:sp>
+      </p:grpSp>
+      <p:grpSp>
+        <p:nvGrpSpPr>
+          <p:cNvPr id="31" name="Group 30">
+            <a:extLst>
+              <a:ext uri="{FF2B5EF4-FFF2-40B4-BE49-F238E27FC236}">
+                <a16:creationId xmlns:a16="http://schemas.microsoft.com/office/drawing/2014/main" id="{18270035-8730-62D3-59B1-01B98DDCD359}"/>
+              </a:ext>
+            </a:extLst>
+          </p:cNvPr>
+          <p:cNvGrpSpPr/>
+          <p:nvPr/>
+        </p:nvGrpSpPr>
+        <p:grpSpPr>
+          <a:xfrm>
+            <a:off x="6751555" y="4079675"/>
+            <a:ext cx="2643905" cy="1691640"/>
+            <a:chOff x="6751555" y="4079675"/>
+            <a:chExt cx="2643905" cy="1691640"/>
+          </a:xfrm>
+        </p:grpSpPr>
+        <p:sp>
+          <p:nvSpPr>
+            <p:cNvPr id="13" name="Shape 10"/>
+            <p:cNvSpPr/>
+            <p:nvPr/>
+          </p:nvSpPr>
+          <p:spPr>
+            <a:xfrm>
+              <a:off x="6759702" y="4079675"/>
+              <a:ext cx="2514600" cy="1691640"/>
+            </a:xfrm>
+            <a:prstGeom prst="roundRect">
+              <a:avLst>
+                <a:gd name="adj" fmla="val 5946"/>
+              </a:avLst>
+            </a:prstGeom>
+            <a:solidFill>
+              <a:srgbClr val="FFFFFF"/>
+            </a:solidFill>
+            <a:ln w="8890">
+              <a:solidFill>
+                <a:srgbClr val="E3DDF0"/>
+              </a:solidFill>
+              <a:prstDash val="solid"/>
+            </a:ln>
+            <a:effectLst>
+              <a:outerShdw blurRad="25400" dist="50800" dir="2700000" algn="bl" rotWithShape="0">
+                <a:srgbClr val="B7AACD">
+                  <a:alpha val="28000"/>
+                </a:srgbClr>
+              </a:outerShdw>
+            </a:effectLst>
+          </p:spPr>
+          <p:txBody>
+            <a:bodyPr/>
+            <a:lstStyle/>
+            <a:p>
+              <a:endParaRPr lang="en-IE"/>
+            </a:p>
+          </p:txBody>
+        </p:sp>
+        <p:sp>
+          <p:nvSpPr>
+            <p:cNvPr id="14" name="Shape 11"/>
+            <p:cNvSpPr/>
+            <p:nvPr/>
+          </p:nvSpPr>
+          <p:spPr>
+            <a:xfrm>
+              <a:off x="6751555" y="4092175"/>
+              <a:ext cx="530352" cy="530352"/>
+            </a:xfrm>
+            <a:prstGeom prst="ellipse">
+              <a:avLst/>
+            </a:prstGeom>
+            <a:solidFill>
+              <a:srgbClr val="ECEBFF"/>
+            </a:solidFill>
+            <a:ln w="12700">
+              <a:solidFill>
+                <a:srgbClr val="ECEBFF">
+                  <a:alpha val="0"/>
+                </a:srgbClr>
+              </a:solidFill>
+              <a:prstDash val="solid"/>
+            </a:ln>
+          </p:spPr>
+          <p:txBody>
+            <a:bodyPr/>
+            <a:lstStyle/>
+            <a:p>
+              <a:endParaRPr lang="en-IE"/>
+            </a:p>
+          </p:txBody>
+        </p:sp>
+        <p:sp>
+          <p:nvSpPr>
+            <p:cNvPr id="15" name="Text 12"/>
+            <p:cNvSpPr/>
+            <p:nvPr/>
+          </p:nvSpPr>
+          <p:spPr>
+            <a:xfrm>
+              <a:off x="6797860" y="4142233"/>
+              <a:ext cx="420624" cy="411480"/>
+            </a:xfrm>
+            <a:prstGeom prst="rect">
+              <a:avLst/>
+            </a:prstGeom>
+            <a:noFill/>
+            <a:ln/>
+          </p:spPr>
+          <p:txBody>
+            <a:bodyPr wrap="square" lIns="0" tIns="0" rIns="0" bIns="0" rtlCol="0" anchor="ctr">
+              <a:normAutofit/>
+            </a:bodyPr>
+            <a:lstStyle/>
+            <a:p>
+              <a:pPr marL="0" indent="0" algn="ctr">
+                <a:buNone/>
+              </a:pPr>
+              <a:r>
+                <a:rPr lang="en-US" sz="2200" dirty="0">
+                  <a:solidFill>
+                    <a:srgbClr val="1D3D9C"/>
+                  </a:solidFill>
+                  <a:latin typeface="Aptos" pitchFamily="34" charset="0"/>
+                  <a:ea typeface="Aptos" pitchFamily="34" charset="-122"/>
+                  <a:cs typeface="Aptos" pitchFamily="34" charset="-120"/>
+                </a:rPr>
+                <a:t>◷</a:t>
+              </a:r>
+              <a:endParaRPr lang="en-US" sz="2200" dirty="0"/>
+            </a:p>
+          </p:txBody>
+        </p:sp>
+        <p:sp>
+          <p:nvSpPr>
+            <p:cNvPr id="16" name="Text 13"/>
+            <p:cNvSpPr/>
+            <p:nvPr/>
+          </p:nvSpPr>
+          <p:spPr>
+            <a:xfrm>
+              <a:off x="7461799" y="4159875"/>
+              <a:ext cx="1866665" cy="549400"/>
+            </a:xfrm>
+            <a:prstGeom prst="rect">
+              <a:avLst/>
+            </a:prstGeom>
+            <a:noFill/>
+            <a:ln/>
+          </p:spPr>
+          <p:txBody>
+            <a:bodyPr wrap="square" lIns="0" tIns="0" rIns="0" bIns="0" rtlCol="0" anchor="t">
+              <a:normAutofit/>
+            </a:bodyPr>
+            <a:lstStyle/>
+            <a:p>
+              <a:pPr marL="0" indent="0" algn="l">
+                <a:buNone/>
+              </a:pPr>
+              <a:r>
+                <a:rPr lang="en-US" b="1" dirty="0">
+                  <a:solidFill>
+                    <a:srgbClr val="1D3D9C"/>
+                  </a:solidFill>
+                  <a:latin typeface="Aptos" pitchFamily="34" charset="0"/>
+                  <a:ea typeface="Aptos" pitchFamily="34" charset="-122"/>
+                  <a:cs typeface="Aptos" pitchFamily="34" charset="-120"/>
+                </a:rPr>
+                <a:t>Exposure</a:t>
+              </a:r>
+            </a:p>
+            <a:p>
+              <a:pPr marL="0" indent="0" algn="l">
+                <a:buNone/>
+              </a:pPr>
+              <a:r>
+                <a:rPr lang="en-US" b="1" dirty="0">
+                  <a:solidFill>
+                    <a:srgbClr val="1D3D9C"/>
+                  </a:solidFill>
+                  <a:latin typeface="Aptos" pitchFamily="34" charset="0"/>
+                  <a:ea typeface="Aptos" pitchFamily="34" charset="-122"/>
+                  <a:cs typeface="Aptos" pitchFamily="34" charset="-120"/>
+                </a:rPr>
+                <a:t> Time</a:t>
+              </a:r>
+              <a:endParaRPr lang="en-US" dirty="0"/>
+            </a:p>
+          </p:txBody>
+        </p:sp>
+        <p:sp>
+          <p:nvSpPr>
+            <p:cNvPr id="17" name="Text 14"/>
+            <p:cNvSpPr/>
+            <p:nvPr/>
+          </p:nvSpPr>
+          <p:spPr>
+            <a:xfrm>
+              <a:off x="7063740" y="4739608"/>
+              <a:ext cx="2331720" cy="844573"/>
+            </a:xfrm>
+            <a:prstGeom prst="rect">
+              <a:avLst/>
+            </a:prstGeom>
+            <a:noFill/>
+            <a:ln/>
+          </p:spPr>
+          <p:txBody>
+            <a:bodyPr wrap="square" lIns="0" tIns="0" rIns="0" bIns="0" rtlCol="0" anchor="t">
+              <a:normAutofit/>
+            </a:bodyPr>
+            <a:lstStyle/>
+            <a:p>
+              <a:pPr marL="0" indent="0" algn="l">
+                <a:buNone/>
+              </a:pPr>
+              <a:r>
+                <a:rPr lang="en-US" sz="1600" dirty="0">
+                  <a:solidFill>
+                    <a:srgbClr val="5F6375"/>
+                  </a:solidFill>
+                  <a:latin typeface="Aptos" pitchFamily="34" charset="0"/>
+                  <a:ea typeface="Aptos" pitchFamily="34" charset="-122"/>
+                  <a:cs typeface="Aptos" pitchFamily="34" charset="-120"/>
+                </a:rPr>
+                <a:t>Records how long temperature remains above the safe limit.</a:t>
+              </a:r>
+              <a:endParaRPr lang="en-US" sz="1600" dirty="0"/>
+            </a:p>
+          </p:txBody>
+        </p:sp>
+      </p:grpSp>
+      <p:grpSp>
+        <p:nvGrpSpPr>
+          <p:cNvPr id="30" name="Group 29">
+            <a:extLst>
+              <a:ext uri="{FF2B5EF4-FFF2-40B4-BE49-F238E27FC236}">
+                <a16:creationId xmlns:a16="http://schemas.microsoft.com/office/drawing/2014/main" id="{FFB08D8C-4489-86E2-0084-10A640D248DC}"/>
+              </a:ext>
+            </a:extLst>
+          </p:cNvPr>
+          <p:cNvGrpSpPr/>
+          <p:nvPr/>
+        </p:nvGrpSpPr>
+        <p:grpSpPr>
+          <a:xfrm>
+            <a:off x="9400032" y="4040241"/>
+            <a:ext cx="2423160" cy="1691640"/>
+            <a:chOff x="9400032" y="4040241"/>
+            <a:chExt cx="2423160" cy="1691640"/>
+          </a:xfrm>
+        </p:grpSpPr>
+        <p:sp>
+          <p:nvSpPr>
+            <p:cNvPr id="18" name="Shape 15"/>
+            <p:cNvSpPr/>
+            <p:nvPr/>
+          </p:nvSpPr>
+          <p:spPr>
+            <a:xfrm>
+              <a:off x="9400032" y="4040241"/>
+              <a:ext cx="2331720" cy="1691640"/>
+            </a:xfrm>
+            <a:prstGeom prst="roundRect">
+              <a:avLst>
+                <a:gd name="adj" fmla="val 5946"/>
+              </a:avLst>
+            </a:prstGeom>
+            <a:solidFill>
+              <a:srgbClr val="FFFFFF"/>
+            </a:solidFill>
+            <a:ln w="8890">
+              <a:solidFill>
+                <a:srgbClr val="E3DDF0"/>
+              </a:solidFill>
+              <a:prstDash val="solid"/>
+            </a:ln>
+            <a:effectLst>
+              <a:outerShdw blurRad="25400" dist="50800" dir="2700000" algn="bl" rotWithShape="0">
+                <a:srgbClr val="B7AACD">
+                  <a:alpha val="28000"/>
+                </a:srgbClr>
+              </a:outerShdw>
+            </a:effectLst>
+          </p:spPr>
+          <p:txBody>
+            <a:bodyPr/>
+            <a:lstStyle/>
+            <a:p>
+              <a:endParaRPr lang="en-IE"/>
+            </a:p>
+          </p:txBody>
+        </p:sp>
+        <p:sp>
+          <p:nvSpPr>
+            <p:cNvPr id="19" name="Shape 16"/>
+            <p:cNvSpPr/>
+            <p:nvPr/>
+          </p:nvSpPr>
+          <p:spPr>
+            <a:xfrm>
+              <a:off x="9445635" y="4082797"/>
+              <a:ext cx="530352" cy="530352"/>
+            </a:xfrm>
+            <a:prstGeom prst="ellipse">
+              <a:avLst/>
+            </a:prstGeom>
+            <a:solidFill>
+              <a:srgbClr val="ECEBFF"/>
+            </a:solidFill>
+            <a:ln w="12700">
+              <a:solidFill>
+                <a:srgbClr val="ECEBFF">
+                  <a:alpha val="0"/>
+                </a:srgbClr>
+              </a:solidFill>
+              <a:prstDash val="solid"/>
+            </a:ln>
+          </p:spPr>
+          <p:txBody>
+            <a:bodyPr/>
+            <a:lstStyle/>
+            <a:p>
+              <a:endParaRPr lang="en-IE"/>
+            </a:p>
+          </p:txBody>
+        </p:sp>
+        <p:sp>
+          <p:nvSpPr>
+            <p:cNvPr id="20" name="Text 17"/>
+            <p:cNvSpPr/>
+            <p:nvPr/>
+          </p:nvSpPr>
+          <p:spPr>
+            <a:xfrm>
+              <a:off x="9515975" y="4134729"/>
+              <a:ext cx="420624" cy="411480"/>
+            </a:xfrm>
+            <a:prstGeom prst="rect">
+              <a:avLst/>
+            </a:prstGeom>
+            <a:noFill/>
+            <a:ln/>
+          </p:spPr>
+          <p:txBody>
+            <a:bodyPr wrap="square" lIns="0" tIns="0" rIns="0" bIns="0" rtlCol="0" anchor="ctr">
+              <a:normAutofit/>
+            </a:bodyPr>
+            <a:lstStyle/>
+            <a:p>
+              <a:pPr marL="0" indent="0" algn="ctr">
+                <a:buNone/>
+              </a:pPr>
+              <a:r>
+                <a:rPr lang="en-US" sz="2200" dirty="0">
+                  <a:solidFill>
+                    <a:srgbClr val="1D3D9C"/>
+                  </a:solidFill>
+                  <a:latin typeface="Aptos" pitchFamily="34" charset="0"/>
+                  <a:ea typeface="Aptos" pitchFamily="34" charset="-122"/>
+                  <a:cs typeface="Aptos" pitchFamily="34" charset="-120"/>
+                </a:rPr>
+                <a:t>⚠</a:t>
+              </a:r>
+              <a:endParaRPr lang="en-US" sz="2200" dirty="0"/>
+            </a:p>
+          </p:txBody>
+        </p:sp>
+        <p:sp>
+          <p:nvSpPr>
+            <p:cNvPr id="21" name="Text 18"/>
+            <p:cNvSpPr/>
+            <p:nvPr/>
+          </p:nvSpPr>
+          <p:spPr>
+            <a:xfrm>
+              <a:off x="10368578" y="4217939"/>
+              <a:ext cx="1015702" cy="404588"/>
+            </a:xfrm>
+            <a:prstGeom prst="rect">
+              <a:avLst/>
+            </a:prstGeom>
+            <a:noFill/>
+            <a:ln/>
+          </p:spPr>
+          <p:txBody>
+            <a:bodyPr wrap="square" lIns="0" tIns="0" rIns="0" bIns="0" rtlCol="0" anchor="t">
+              <a:noAutofit/>
+            </a:bodyPr>
+            <a:lstStyle/>
+            <a:p>
+              <a:pPr marL="0" indent="0" algn="l">
+                <a:buNone/>
+              </a:pPr>
+              <a:r>
+                <a:rPr lang="en-US" b="1" dirty="0">
+                  <a:solidFill>
+                    <a:srgbClr val="1D3D9C"/>
+                  </a:solidFill>
+                  <a:latin typeface="Aptos" pitchFamily="34" charset="0"/>
+                  <a:ea typeface="Aptos" pitchFamily="34" charset="-122"/>
+                  <a:cs typeface="Aptos" pitchFamily="34" charset="-120"/>
+                </a:rPr>
+                <a:t>Alerts</a:t>
+              </a:r>
+              <a:endParaRPr lang="en-US" dirty="0"/>
+            </a:p>
+          </p:txBody>
+        </p:sp>
+        <p:sp>
+          <p:nvSpPr>
+            <p:cNvPr id="22" name="Text 19"/>
+            <p:cNvSpPr/>
+            <p:nvPr/>
+          </p:nvSpPr>
+          <p:spPr>
+            <a:xfrm>
+              <a:off x="9582911" y="4790223"/>
+              <a:ext cx="2240281" cy="918973"/>
+            </a:xfrm>
+            <a:prstGeom prst="rect">
+              <a:avLst/>
+            </a:prstGeom>
+            <a:noFill/>
+            <a:ln/>
+          </p:spPr>
+          <p:txBody>
+            <a:bodyPr wrap="square" lIns="0" tIns="0" rIns="0" bIns="0" rtlCol="0" anchor="t">
+              <a:normAutofit/>
+            </a:bodyPr>
+            <a:lstStyle/>
+            <a:p>
+              <a:pPr marL="0" indent="0" algn="l">
+                <a:buNone/>
+              </a:pPr>
+              <a:r>
+                <a:rPr lang="en-US" sz="1600" dirty="0">
+                  <a:solidFill>
+                    <a:srgbClr val="5F6375"/>
+                  </a:solidFill>
+                  <a:latin typeface="Aptos" pitchFamily="34" charset="0"/>
+                  <a:ea typeface="Aptos" pitchFamily="34" charset="-122"/>
+                  <a:cs typeface="Aptos" pitchFamily="34" charset="-120"/>
+                </a:rPr>
+                <a:t>Uses LED visual feedback, a buzzer, and phone notifications.</a:t>
+              </a:r>
+              <a:endParaRPr lang="en-US" sz="1600" dirty="0"/>
+            </a:p>
+          </p:txBody>
+        </p:sp>
+      </p:grpSp>
+      <p:grpSp>
+        <p:nvGrpSpPr>
+          <p:cNvPr id="33" name="Group 32">
+            <a:extLst>
+              <a:ext uri="{FF2B5EF4-FFF2-40B4-BE49-F238E27FC236}">
+                <a16:creationId xmlns:a16="http://schemas.microsoft.com/office/drawing/2014/main" id="{5A66D382-E3E3-9C5D-23E5-4A63E50CD3DE}"/>
+              </a:ext>
+            </a:extLst>
+          </p:cNvPr>
+          <p:cNvGrpSpPr/>
+          <p:nvPr/>
+        </p:nvGrpSpPr>
+        <p:grpSpPr>
+          <a:xfrm>
+            <a:off x="4021923" y="5934456"/>
+            <a:ext cx="7691540" cy="747727"/>
+            <a:chOff x="4021923" y="5934456"/>
+            <a:chExt cx="7691540" cy="747727"/>
+          </a:xfrm>
+        </p:grpSpPr>
+        <p:sp>
+          <p:nvSpPr>
+            <p:cNvPr id="23" name="Shape 20"/>
+            <p:cNvSpPr/>
+            <p:nvPr/>
+          </p:nvSpPr>
+          <p:spPr>
+            <a:xfrm>
+              <a:off x="4021923" y="5934456"/>
+              <a:ext cx="7691540" cy="667512"/>
+            </a:xfrm>
+            <a:prstGeom prst="roundRect">
+              <a:avLst>
+                <a:gd name="adj" fmla="val 8148"/>
+              </a:avLst>
+            </a:prstGeom>
+            <a:solidFill>
+              <a:srgbClr val="FFFFFF"/>
+            </a:solidFill>
+            <a:ln w="8890">
+              <a:solidFill>
+                <a:srgbClr val="E3DDF0"/>
+              </a:solidFill>
+              <a:prstDash val="solid"/>
+            </a:ln>
+            <a:effectLst>
+              <a:outerShdw blurRad="25400" dist="50800" dir="2700000" algn="bl" rotWithShape="0">
+                <a:srgbClr val="B7AACD">
+                  <a:alpha val="28000"/>
+                </a:srgbClr>
+              </a:outerShdw>
+            </a:effectLst>
+          </p:spPr>
+          <p:txBody>
+            <a:bodyPr/>
+            <a:lstStyle/>
+            <a:p>
+              <a:endParaRPr lang="en-IE" dirty="0"/>
+            </a:p>
+          </p:txBody>
+        </p:sp>
+        <p:sp>
+          <p:nvSpPr>
+            <p:cNvPr id="24" name="Shape 21"/>
+            <p:cNvSpPr/>
+            <p:nvPr/>
+          </p:nvSpPr>
+          <p:spPr>
+            <a:xfrm>
+              <a:off x="4142232" y="6003036"/>
+              <a:ext cx="530352" cy="530352"/>
+            </a:xfrm>
+            <a:prstGeom prst="ellipse">
+              <a:avLst/>
+            </a:prstGeom>
+            <a:solidFill>
+              <a:srgbClr val="ECEBFF"/>
+            </a:solidFill>
+            <a:ln w="12700">
+              <a:solidFill>
+                <a:srgbClr val="ECEBFF">
+                  <a:alpha val="0"/>
+                </a:srgbClr>
+              </a:solidFill>
+              <a:prstDash val="solid"/>
+            </a:ln>
+          </p:spPr>
+          <p:txBody>
+            <a:bodyPr/>
+            <a:lstStyle/>
+            <a:p>
+              <a:endParaRPr lang="en-IE"/>
+            </a:p>
+          </p:txBody>
+        </p:sp>
+        <p:sp>
+          <p:nvSpPr>
+            <p:cNvPr id="25" name="Text 22"/>
+            <p:cNvSpPr/>
+            <p:nvPr/>
+          </p:nvSpPr>
+          <p:spPr>
+            <a:xfrm>
+              <a:off x="4207647" y="6071616"/>
+              <a:ext cx="420624" cy="411480"/>
+            </a:xfrm>
+            <a:prstGeom prst="rect">
+              <a:avLst/>
+            </a:prstGeom>
+            <a:noFill/>
+            <a:ln/>
+          </p:spPr>
+          <p:txBody>
+            <a:bodyPr wrap="square" lIns="0" tIns="0" rIns="0" bIns="0" rtlCol="0" anchor="ctr">
+              <a:normAutofit/>
+            </a:bodyPr>
+            <a:lstStyle/>
+            <a:p>
+              <a:pPr marL="0" indent="0" algn="ctr">
+                <a:buNone/>
+              </a:pPr>
+              <a:r>
+                <a:rPr lang="en-US" sz="2200" dirty="0">
+                  <a:solidFill>
+                    <a:srgbClr val="1D3D9C"/>
+                  </a:solidFill>
+                  <a:latin typeface="Aptos" pitchFamily="34" charset="0"/>
+                  <a:ea typeface="Aptos" pitchFamily="34" charset="-122"/>
+                  <a:cs typeface="Aptos" pitchFamily="34" charset="-120"/>
+                </a:rPr>
+                <a:t>✚</a:t>
+              </a:r>
+              <a:endParaRPr lang="en-US" sz="2200" dirty="0"/>
+            </a:p>
+          </p:txBody>
+        </p:sp>
+        <p:sp>
+          <p:nvSpPr>
+            <p:cNvPr id="26" name="Text 23"/>
+            <p:cNvSpPr/>
+            <p:nvPr/>
+          </p:nvSpPr>
+          <p:spPr>
+            <a:xfrm>
+              <a:off x="4829468" y="6017572"/>
+              <a:ext cx="1691640" cy="292608"/>
+            </a:xfrm>
+            <a:prstGeom prst="rect">
+              <a:avLst/>
+            </a:prstGeom>
+            <a:noFill/>
+            <a:ln/>
+          </p:spPr>
+          <p:txBody>
+            <a:bodyPr wrap="square" lIns="0" tIns="0" rIns="0" bIns="0" rtlCol="0" anchor="t">
+              <a:normAutofit/>
+            </a:bodyPr>
+            <a:lstStyle/>
+            <a:p>
+              <a:pPr marL="0" indent="0" algn="l">
+                <a:buNone/>
+              </a:pPr>
+              <a:r>
+                <a:rPr lang="en-US" sz="1750" b="1" dirty="0">
+                  <a:solidFill>
+                    <a:srgbClr val="1D3D9C"/>
+                  </a:solidFill>
+                  <a:latin typeface="Aptos" pitchFamily="34" charset="0"/>
+                  <a:ea typeface="Aptos" pitchFamily="34" charset="-122"/>
+                  <a:cs typeface="Aptos" pitchFamily="34" charset="-120"/>
+                </a:rPr>
+                <a:t>Why It Matters</a:t>
+              </a:r>
+              <a:endParaRPr lang="en-US" sz="1750" dirty="0"/>
+            </a:p>
+          </p:txBody>
+        </p:sp>
+        <p:sp>
+          <p:nvSpPr>
+            <p:cNvPr id="27" name="Text 24"/>
+            <p:cNvSpPr/>
+            <p:nvPr/>
+          </p:nvSpPr>
+          <p:spPr>
+            <a:xfrm>
+              <a:off x="6076187" y="6257397"/>
+              <a:ext cx="5549763" cy="424786"/>
+            </a:xfrm>
+            <a:prstGeom prst="rect">
+              <a:avLst/>
+            </a:prstGeom>
+            <a:noFill/>
+            <a:ln/>
+          </p:spPr>
+          <p:txBody>
+            <a:bodyPr wrap="square" lIns="0" tIns="0" rIns="0" bIns="0" rtlCol="0" anchor="t">
+              <a:normAutofit/>
+            </a:bodyPr>
+            <a:lstStyle/>
+            <a:p>
+              <a:r>
+                <a:rPr lang="en-IE" dirty="0">
+                  <a:solidFill>
+                    <a:srgbClr val="5E6373"/>
+                  </a:solidFill>
+                </a:rPr>
+                <a:t>Less manual work.   Actionable alerts only</a:t>
+              </a:r>
+              <a:r>
+                <a:rPr lang="en-IE" dirty="0">
+                  <a:solidFill>
+                    <a:schemeClr val="accent1">
+                      <a:lumMod val="75000"/>
+                    </a:schemeClr>
+                  </a:solidFill>
+                </a:rPr>
+                <a:t>.</a:t>
+              </a:r>
+              <a:endParaRPr lang="ru-RU" dirty="0">
+                <a:solidFill>
+                  <a:schemeClr val="accent1">
+                    <a:lumMod val="75000"/>
+                  </a:schemeClr>
+                </a:solidFill>
+              </a:endParaRPr>
+            </a:p>
+          </p:txBody>
+        </p:sp>
+      </p:grpSp>
+      <p:sp>
+        <p:nvSpPr>
+          <p:cNvPr id="29" name="Shape 20">
+            <a:extLst>
+              <a:ext uri="{FF2B5EF4-FFF2-40B4-BE49-F238E27FC236}">
+                <a16:creationId xmlns:a16="http://schemas.microsoft.com/office/drawing/2014/main" id="{A6127068-4B25-9293-33A4-97EF49858F13}"/>
+              </a:ext>
+            </a:extLst>
+          </p:cNvPr>
+          <p:cNvSpPr/>
+          <p:nvPr/>
+        </p:nvSpPr>
+        <p:spPr>
+          <a:xfrm>
+            <a:off x="3961638" y="1570948"/>
+            <a:ext cx="7795260" cy="2074581"/>
+          </a:xfrm>
+          <a:prstGeom prst="roundRect">
+            <a:avLst>
+              <a:gd name="adj" fmla="val 8148"/>
+            </a:avLst>
+          </a:prstGeom>
+          <a:solidFill>
+            <a:srgbClr val="FFFFFF"/>
+          </a:solidFill>
+          <a:ln w="8890">
+            <a:solidFill>
+              <a:srgbClr val="E3DDF0"/>
+            </a:solidFill>
+            <a:prstDash val="solid"/>
+          </a:ln>
+          <a:effectLst>
+            <a:outerShdw blurRad="533400" dir="3480000" algn="bl" rotWithShape="0">
+              <a:srgbClr val="B7AACD">
+                <a:alpha val="74000"/>
+              </a:srgbClr>
+            </a:outerShdw>
+          </a:effectLst>
+        </p:spPr>
+        <p:txBody>
+          <a:bodyPr/>
+          <a:lstStyle/>
+          <a:p>
+            <a:pPr>
+              <a:lnSpc>
+                <a:spcPct val="150000"/>
+              </a:lnSpc>
+            </a:pPr>
+            <a:r>
+              <a:rPr lang="en-US" b="1" dirty="0">
+                <a:solidFill>
+                  <a:schemeClr val="accent1">
+                    <a:lumMod val="75000"/>
+                  </a:schemeClr>
+                </a:solidFill>
+              </a:rPr>
+              <a:t>Problem</a:t>
+            </a:r>
+          </a:p>
+          <a:p>
+            <a:r>
+              <a:rPr lang="en-US" sz="1600" dirty="0">
+                <a:solidFill>
+                  <a:srgbClr val="5E6373"/>
+                </a:solidFill>
+              </a:rPr>
+              <a:t>• </a:t>
+            </a:r>
+            <a:r>
+              <a:rPr lang="en-US" b="1" dirty="0">
+                <a:solidFill>
+                  <a:srgbClr val="5E6373"/>
+                </a:solidFill>
+              </a:rPr>
+              <a:t>Loss of Efficacy: </a:t>
+            </a:r>
+            <a:r>
+              <a:rPr lang="en-US" dirty="0">
+                <a:solidFill>
+                  <a:srgbClr val="5E6373"/>
+                </a:solidFill>
+              </a:rPr>
+              <a:t>Sensitive controlled drugs (Morphine, Fentanyl) degrade when exposed to heat.</a:t>
+            </a:r>
+            <a:endParaRPr lang="en-US" sz="1600" dirty="0">
+              <a:solidFill>
+                <a:srgbClr val="5E6373"/>
+              </a:solidFill>
+            </a:endParaRPr>
+          </a:p>
+          <a:p>
+            <a:r>
+              <a:rPr lang="en-US" dirty="0">
+                <a:solidFill>
+                  <a:srgbClr val="5E6373"/>
+                </a:solidFill>
+              </a:rPr>
+              <a:t>• </a:t>
+            </a:r>
+            <a:r>
+              <a:rPr lang="en-US" b="1" dirty="0">
+                <a:solidFill>
+                  <a:srgbClr val="5E6373"/>
+                </a:solidFill>
+              </a:rPr>
+              <a:t>Heat Risk: </a:t>
+            </a:r>
+            <a:r>
+              <a:rPr lang="en-US" dirty="0">
+                <a:solidFill>
+                  <a:srgbClr val="5E6373"/>
+                </a:solidFill>
+              </a:rPr>
+              <a:t>Ambulance storage temperatures often exceed safe limits.</a:t>
+            </a:r>
+            <a:endParaRPr lang="en-US" sz="1600" dirty="0">
+              <a:solidFill>
+                <a:srgbClr val="5E6373"/>
+              </a:solidFill>
+            </a:endParaRPr>
+          </a:p>
+          <a:p>
+            <a:r>
+              <a:rPr lang="en-US" sz="1600" dirty="0">
+                <a:solidFill>
+                  <a:srgbClr val="5E6373"/>
+                </a:solidFill>
+              </a:rPr>
+              <a:t>• </a:t>
+            </a:r>
+            <a:r>
+              <a:rPr lang="en-US" b="1" dirty="0">
+                <a:solidFill>
+                  <a:srgbClr val="5E6373"/>
+                </a:solidFill>
+              </a:rPr>
+              <a:t>The Blind Spot: </a:t>
+            </a:r>
+            <a:r>
+              <a:rPr lang="en-US" dirty="0">
+                <a:solidFill>
+                  <a:srgbClr val="5E6373"/>
+                </a:solidFill>
+              </a:rPr>
+              <a:t>Without tracking, it’s impossible to know exposure duration</a:t>
+            </a:r>
+            <a:r>
+              <a:rPr lang="en-US" sz="1600" dirty="0">
+                <a:solidFill>
+                  <a:srgbClr val="5E6373"/>
+                </a:solidFill>
+              </a:rPr>
+              <a:t>.</a:t>
+            </a:r>
+          </a:p>
+        </p:txBody>
+      </p:sp>
+    </p:spTree>
+  </p:cSld>
+  <p:clrMapOvr>
+    <a:masterClrMapping/>
+  </p:clrMapOvr>
+  <p:timing>
+    <p:tnLst>
+      <p:par>
+        <p:cTn id="1" dur="indefinite" restart="never" nodeType="tmRoot">
+          <p:childTnLst>
+            <p:seq concurrent="1" nextAc="seek">
+              <p:cTn id="2" dur="indefinite" nodeType="mainSeq">
+                <p:childTnLst>
+                  <p:par>
+                    <p:cTn id="3" fill="hold">
+                      <p:stCondLst>
+                        <p:cond delay="indefinite"/>
+                      </p:stCondLst>
+                      <p:childTnLst>
+                        <p:par>
+                          <p:cTn id="4" fill="hold">
+                            <p:stCondLst>
+                              <p:cond delay="0"/>
+                            </p:stCondLst>
+                            <p:childTnLst>
+                              <p:par>
+                                <p:cTn id="5" presetID="1" presetClass="entr" presetSubtype="0" fill="hold" grpId="0" nodeType="clickEffect">
+                                  <p:stCondLst>
+                                    <p:cond delay="0"/>
+                                  </p:stCondLst>
+                                  <p:childTnLst>
+                                    <p:set>
+                                      <p:cBhvr>
+                                        <p:cTn id="6" dur="1" fill="hold">
+                                          <p:stCondLst>
+                                            <p:cond delay="0"/>
+                                          </p:stCondLst>
+                                        </p:cTn>
+                                        <p:tgtEl>
+                                          <p:spTgt spid="29"/>
+                                        </p:tgtEl>
+                                        <p:attrNameLst>
+                                          <p:attrName>style.visibility</p:attrName>
+                                        </p:attrNameLst>
+                                      </p:cBhvr>
+                                      <p:to>
+                                        <p:strVal val="visible"/>
+                                      </p:to>
+                                    </p:set>
+                                  </p:childTnLst>
+                                </p:cTn>
+                              </p:par>
+                            </p:childTnLst>
+                          </p:cTn>
+                        </p:par>
+                      </p:childTnLst>
+                    </p:cTn>
+                  </p:par>
+                  <p:par>
+                    <p:cTn id="7" fill="hold">
+                      <p:stCondLst>
+                        <p:cond delay="indefinite"/>
+                      </p:stCondLst>
+                      <p:childTnLst>
+                        <p:par>
+                          <p:cTn id="8" fill="hold">
+                            <p:stCondLst>
+                              <p:cond delay="0"/>
+                            </p:stCondLst>
+                            <p:childTnLst>
+                              <p:par>
+                                <p:cTn id="9" presetID="1" presetClass="entr" presetSubtype="0" fill="hold" nodeType="clickEffect">
+                                  <p:stCondLst>
+                                    <p:cond delay="0"/>
+                                  </p:stCondLst>
+                                  <p:childTnLst>
+                                    <p:set>
+                                      <p:cBhvr>
+                                        <p:cTn id="10" dur="1" fill="hold">
+                                          <p:stCondLst>
+                                            <p:cond delay="0"/>
+                                          </p:stCondLst>
+                                        </p:cTn>
+                                        <p:tgtEl>
+                                          <p:spTgt spid="32"/>
+                                        </p:tgtEl>
+                                        <p:attrNameLst>
+                                          <p:attrName>style.visibility</p:attrName>
+                                        </p:attrNameLst>
+                                      </p:cBhvr>
+                                      <p:to>
+                                        <p:strVal val="visible"/>
+                                      </p:to>
+                                    </p:set>
+                                  </p:childTnLst>
+                                </p:cTn>
+                              </p:par>
+                            </p:childTnLst>
+                          </p:cTn>
+                        </p:par>
+                      </p:childTnLst>
+                    </p:cTn>
+                  </p:par>
+                  <p:par>
+                    <p:cTn id="11" fill="hold">
+                      <p:stCondLst>
+                        <p:cond delay="indefinite"/>
+                      </p:stCondLst>
+                      <p:childTnLst>
+                        <p:par>
+                          <p:cTn id="12" fill="hold">
+                            <p:stCondLst>
+                              <p:cond delay="0"/>
+                            </p:stCondLst>
+                            <p:childTnLst>
+                              <p:par>
+                                <p:cTn id="13" presetID="1" presetClass="entr" presetSubtype="0" fill="hold" nodeType="clickEffect">
+                                  <p:stCondLst>
+                                    <p:cond delay="0"/>
+                                  </p:stCondLst>
+                                  <p:childTnLst>
+                                    <p:set>
+                                      <p:cBhvr>
+                                        <p:cTn id="14" dur="1" fill="hold">
+                                          <p:stCondLst>
+                                            <p:cond delay="0"/>
+                                          </p:stCondLst>
+                                        </p:cTn>
+                                        <p:tgtEl>
+                                          <p:spTgt spid="31"/>
+                                        </p:tgtEl>
+                                        <p:attrNameLst>
+                                          <p:attrName>style.visibility</p:attrName>
+                                        </p:attrNameLst>
+                                      </p:cBhvr>
+                                      <p:to>
+                                        <p:strVal val="visible"/>
+                                      </p:to>
+                                    </p:set>
+                                  </p:childTnLst>
+                                </p:cTn>
+                              </p:par>
+                            </p:childTnLst>
+                          </p:cTn>
+                        </p:par>
+                      </p:childTnLst>
+                    </p:cTn>
+                  </p:par>
+                  <p:par>
+                    <p:cTn id="15" fill="hold">
+                      <p:stCondLst>
+                        <p:cond delay="indefinite"/>
+                      </p:stCondLst>
+                      <p:childTnLst>
+                        <p:par>
+                          <p:cTn id="16" fill="hold">
+                            <p:stCondLst>
+                              <p:cond delay="0"/>
+                            </p:stCondLst>
+                            <p:childTnLst>
+                              <p:par>
+                                <p:cTn id="17" presetID="1" presetClass="entr" presetSubtype="0" fill="hold" nodeType="clickEffect">
+                                  <p:stCondLst>
+                                    <p:cond delay="0"/>
+                                  </p:stCondLst>
+                                  <p:childTnLst>
+                                    <p:set>
+                                      <p:cBhvr>
+                                        <p:cTn id="18" dur="1" fill="hold">
+                                          <p:stCondLst>
+                                            <p:cond delay="0"/>
+                                          </p:stCondLst>
+                                        </p:cTn>
+                                        <p:tgtEl>
+                                          <p:spTgt spid="30"/>
+                                        </p:tgtEl>
+                                        <p:attrNameLst>
+                                          <p:attrName>style.visibility</p:attrName>
+                                        </p:attrNameLst>
+                                      </p:cBhvr>
+                                      <p:to>
+                                        <p:strVal val="visible"/>
+                                      </p:to>
+                                    </p:set>
+                                  </p:childTnLst>
+                                </p:cTn>
+                              </p:par>
+                            </p:childTnLst>
+                          </p:cTn>
+                        </p:par>
+                      </p:childTnLst>
+                    </p:cTn>
+                  </p:par>
+                  <p:par>
+                    <p:cTn id="19" fill="hold">
+                      <p:stCondLst>
+                        <p:cond delay="indefinite"/>
+                      </p:stCondLst>
+                      <p:childTnLst>
+                        <p:par>
+                          <p:cTn id="20" fill="hold">
+                            <p:stCondLst>
+                              <p:cond delay="0"/>
+                            </p:stCondLst>
+                            <p:childTnLst>
+                              <p:par>
+                                <p:cTn id="21" presetID="1" presetClass="entr" presetSubtype="0" fill="hold" nodeType="clickEffect">
+                                  <p:stCondLst>
+                                    <p:cond delay="0"/>
+                                  </p:stCondLst>
+                                  <p:childTnLst>
+                                    <p:set>
+                                      <p:cBhvr>
+                                        <p:cTn id="22" dur="1" fill="hold">
+                                          <p:stCondLst>
+                                            <p:cond delay="0"/>
+                                          </p:stCondLst>
+                                        </p:cTn>
+                                        <p:tgtEl>
+                                          <p:spTgt spid="33"/>
+                                        </p:tgtEl>
+                                        <p:attrNameLst>
+                                          <p:attrName>style.visibility</p:attrName>
+                                        </p:attrNameLst>
+                                      </p:cBhvr>
+                                      <p:to>
+                                        <p:strVal val="visible"/>
+                                      </p:to>
+                                    </p:set>
+                                  </p:childTnLst>
+                                </p:cTn>
+                              </p:par>
+                            </p:childTnLst>
+                          </p:cTn>
+                        </p:par>
+                      </p:childTnLst>
+                    </p:cTn>
+                  </p:par>
+                </p:childTnLst>
+              </p:cTn>
+              <p:prevCondLst>
+                <p:cond evt="onPrev" delay="0">
+                  <p:tgtEl>
+                    <p:sldTgt/>
+                  </p:tgtEl>
+                </p:cond>
+              </p:prevCondLst>
+              <p:nextCondLst>
+                <p:cond evt="onNext" delay="0">
+                  <p:tgtEl>
+                    <p:sldTgt/>
+                  </p:tgtEl>
+                </p:cond>
+              </p:nextCondLst>
+            </p:seq>
+          </p:childTnLst>
+        </p:cTn>
+      </p:par>
+    </p:tnLst>
+    <p:bldLst>
+      <p:bldP spid="29" grpId="0" animBg="1"/>
+    </p:bldLst>
+  </p:timing>
+</p:sld>
+</file>
+
+<file path=ppt/slides/slide2.xml><?xml version="1.0" encoding="utf-8"?>
+<p:sld xmlns:a="http://schemas.openxmlformats.org/drawingml/2006/main" xmlns:r="http://schemas.openxmlformats.org/officeDocument/2006/relationships" xmlns:p="http://schemas.openxmlformats.org/presentationml/2006/main" show="0">
+  <p:cSld name="Slide 1">
+    <p:bg>
+      <p:bgPr>
+        <a:solidFill>
+          <a:srgbClr val="EFEAF9"/>
+        </a:solidFill>
+        <a:effectLst/>
+      </p:bgPr>
+    </p:bg>
+    <p:spTree>
+      <p:nvGrpSpPr>
+        <p:cNvPr id="1" name=""/>
+        <p:cNvGrpSpPr/>
+        <p:nvPr/>
+      </p:nvGrpSpPr>
+      <p:grpSpPr>
+        <a:xfrm>
+          <a:off x="0" y="0"/>
+          <a:ext cx="0" cy="0"/>
+          <a:chOff x="0" y="0"/>
+          <a:chExt cx="0" cy="0"/>
+        </a:xfrm>
+      </p:grpSpPr>
       <p:pic>
         <p:nvPicPr>
           <p:cNvPr id="3" name="Image 0" descr="/mnt/data/tempsafe_photo_panel_crop.png"/>
@@ -1031,7 +2894,7 @@
         <p:spPr>
           <a:xfrm>
             <a:off x="4654296" y="4179617"/>
-            <a:ext cx="2657502" cy="382257"/>
+            <a:ext cx="1704668" cy="529658"/>
           </a:xfrm>
           <a:prstGeom prst="rect">
             <a:avLst/>
@@ -1909,10 +3772,93 @@
         </p:txBody>
       </p:sp>
     </p:spTree>
+    <p:extLst>
+      <p:ext uri="{BB962C8B-B14F-4D97-AF65-F5344CB8AC3E}">
+        <p14:creationId xmlns:p14="http://schemas.microsoft.com/office/powerpoint/2010/main" val="1346267894"/>
+      </p:ext>
+    </p:extLst>
   </p:cSld>
   <p:clrMapOvr>
     <a:masterClrMapping/>
   </p:clrMapOvr>
+  <p:timing>
+    <p:tnLst>
+      <p:par>
+        <p:cTn id="1" dur="indefinite" restart="never" nodeType="tmRoot">
+          <p:childTnLst>
+            <p:seq concurrent="1" nextAc="seek">
+              <p:cTn id="2" dur="indefinite" nodeType="mainSeq">
+                <p:childTnLst>
+                  <p:par>
+                    <p:cTn id="3" fill="hold">
+                      <p:stCondLst>
+                        <p:cond delay="indefinite"/>
+                      </p:stCondLst>
+                      <p:childTnLst>
+                        <p:par>
+                          <p:cTn id="4" fill="hold">
+                            <p:stCondLst>
+                              <p:cond delay="0"/>
+                            </p:stCondLst>
+                            <p:childTnLst>
+                              <p:par>
+                                <p:cTn id="5" presetID="1" presetClass="entr" presetSubtype="0" fill="hold" grpId="0" nodeType="clickEffect">
+                                  <p:stCondLst>
+                                    <p:cond delay="0"/>
+                                  </p:stCondLst>
+                                  <p:childTnLst>
+                                    <p:set>
+                                      <p:cBhvr>
+                                        <p:cTn id="6" dur="1" fill="hold">
+                                          <p:stCondLst>
+                                            <p:cond delay="0"/>
+                                          </p:stCondLst>
+                                        </p:cTn>
+                                        <p:tgtEl>
+                                          <p:spTgt spid="29"/>
+                                        </p:tgtEl>
+                                        <p:attrNameLst>
+                                          <p:attrName>style.visibility</p:attrName>
+                                        </p:attrNameLst>
+                                      </p:cBhvr>
+                                      <p:to>
+                                        <p:strVal val="visible"/>
+                                      </p:to>
+                                    </p:set>
+                                  </p:childTnLst>
+                                </p:cTn>
+                              </p:par>
+                            </p:childTnLst>
+                          </p:cTn>
+                        </p:par>
+                      </p:childTnLst>
+                    </p:cTn>
+                  </p:par>
+                </p:childTnLst>
+              </p:cTn>
+              <p:prevCondLst>
+                <p:cond evt="onPrev" delay="0">
+                  <p:tgtEl>
+                    <p:sldTgt/>
+                  </p:tgtEl>
+                </p:cond>
+              </p:prevCondLst>
+              <p:nextCondLst>
+                <p:cond evt="onNext" delay="0">
+                  <p:tgtEl>
+                    <p:sldTgt/>
+                  </p:tgtEl>
+                </p:cond>
+              </p:nextCondLst>
+            </p:seq>
+          </p:childTnLst>
+        </p:cTn>
+      </p:par>
+    </p:tnLst>
+    <p:bldLst>
+      <p:bldP spid="29" grpId="0" animBg="1"/>
+    </p:bldLst>
+  </p:timing>
 </p:sld>
 </file>
 
@@ -2201,7 +4147,34 @@
       </a:bgFillStyleLst>
     </a:fmtScheme>
   </a:themeElements>
-  <a:objectDefaults/>
+  <a:objectDefaults>
+    <a:spDef>
+      <a:spPr>
+        <a:solidFill>
+          <a:srgbClr val="FFFFFF"/>
+        </a:solidFill>
+        <a:ln w="8890">
+          <a:solidFill>
+            <a:srgbClr val="FFFFFF"/>
+          </a:solidFill>
+          <a:prstDash val="solid"/>
+        </a:ln>
+        <a:effectLst>
+          <a:outerShdw blurRad="25400" dist="50800" dir="2700000" algn="bl" rotWithShape="0">
+            <a:srgbClr val="B7AACD">
+              <a:alpha val="28000"/>
+            </a:srgbClr>
+          </a:outerShdw>
+        </a:effectLst>
+      </a:spPr>
+      <a:bodyPr/>
+      <a:lstStyle>
+        <a:defPPr algn="l">
+          <a:defRPr/>
+        </a:defPPr>
+      </a:lstStyle>
+    </a:spDef>
+  </a:objectDefaults>
   <a:extraClrSchemeLst/>
   <a:extLst>
     <a:ext uri="{05A4C25C-085E-4340-85A3-A5531E510DB2}">
